--- a/chapter11/parts/part-09-crowd-versus-expert/clip.pptx
+++ b/chapter11/parts/part-09-crowd-versus-expert/clip.pptx
@@ -4397,10 +4397,12 @@
           </a:bodyPr>
           <a:lstStyle/>
           <a:p>
-            <a:pPr>
+            <a:pPr lvl="0" marL="457200" indent="-228600">
+              <a:buFont typeface="Calibri"/>
               <a:spcAft>
                 <a:spcPts val="1000"/>
               </a:spcAft>
+              <a:buSzPct val="100000"/>
               <a:buChar char="•"/>
               <a:lnSpc>
                 <a:spcPts val="2200"/>
@@ -4417,10 +4419,12 @@
             </a:r>
           </a:p>
           <a:p>
-            <a:pPr>
+            <a:pPr lvl="0" marL="457200" indent="-228600">
+              <a:buFont typeface="Calibri"/>
               <a:spcAft>
                 <a:spcPts val="1000"/>
               </a:spcAft>
+              <a:buSzPct val="100000"/>
               <a:buChar char="•"/>
               <a:lnSpc>
                 <a:spcPts val="2200"/>
@@ -4437,10 +4441,12 @@
             </a:r>
           </a:p>
           <a:p>
-            <a:pPr>
+            <a:pPr lvl="0" marL="457200" indent="-228600">
+              <a:buFont typeface="Calibri"/>
               <a:spcAft>
                 <a:spcPts val="1000"/>
               </a:spcAft>
+              <a:buSzPct val="100000"/>
               <a:buChar char="•"/>
               <a:lnSpc>
                 <a:spcPts val="2200"/>
@@ -4576,10 +4582,12 @@
           </a:bodyPr>
           <a:lstStyle/>
           <a:p>
-            <a:pPr>
+            <a:pPr lvl="0" marL="457200" indent="-228600">
+              <a:buFont typeface="Calibri"/>
               <a:spcAft>
                 <a:spcPts val="1000"/>
               </a:spcAft>
+              <a:buSzPct val="100000"/>
               <a:buChar char="•"/>
               <a:lnSpc>
                 <a:spcPts val="2200"/>
@@ -4596,10 +4604,12 @@
             </a:r>
           </a:p>
           <a:p>
-            <a:pPr>
+            <a:pPr lvl="0" marL="457200" indent="-228600">
+              <a:buFont typeface="Calibri"/>
               <a:spcAft>
                 <a:spcPts val="1000"/>
               </a:spcAft>
+              <a:buSzPct val="100000"/>
               <a:buChar char="•"/>
               <a:lnSpc>
                 <a:spcPts val="2200"/>
@@ -4735,10 +4745,12 @@
           </a:bodyPr>
           <a:lstStyle/>
           <a:p>
-            <a:pPr>
+            <a:pPr lvl="0" marL="457200" indent="-228600">
+              <a:buFont typeface="Calibri"/>
               <a:spcAft>
                 <a:spcPts val="1000"/>
               </a:spcAft>
+              <a:buSzPct val="100000"/>
               <a:buChar char="•"/>
               <a:lnSpc>
                 <a:spcPts val="2200"/>
@@ -4874,10 +4886,12 @@
           </a:bodyPr>
           <a:lstStyle/>
           <a:p>
-            <a:pPr>
+            <a:pPr lvl="0" marL="457200" indent="-228600">
+              <a:buFont typeface="Calibri"/>
               <a:spcAft>
                 <a:spcPts val="1000"/>
               </a:spcAft>
+              <a:buSzPct val="100000"/>
               <a:buChar char="•"/>
               <a:lnSpc>
                 <a:spcPts val="2200"/>
@@ -4894,10 +4908,12 @@
             </a:r>
           </a:p>
           <a:p>
-            <a:pPr>
+            <a:pPr lvl="0" marL="457200" indent="-228600">
+              <a:buFont typeface="Calibri"/>
               <a:spcAft>
                 <a:spcPts val="1000"/>
               </a:spcAft>
+              <a:buSzPct val="100000"/>
               <a:buChar char="•"/>
               <a:lnSpc>
                 <a:spcPts val="2200"/>
@@ -4914,10 +4930,12 @@
             </a:r>
           </a:p>
           <a:p>
-            <a:pPr>
+            <a:pPr lvl="0" marL="457200" indent="-228600">
+              <a:buFont typeface="Calibri"/>
               <a:spcAft>
                 <a:spcPts val="1000"/>
               </a:spcAft>
+              <a:buSzPct val="100000"/>
               <a:buChar char="•"/>
               <a:lnSpc>
                 <a:spcPts val="2200"/>
@@ -5053,10 +5071,12 @@
           </a:bodyPr>
           <a:lstStyle/>
           <a:p>
-            <a:pPr>
+            <a:pPr lvl="0" marL="457200" indent="-228600">
+              <a:buFont typeface="Calibri"/>
               <a:spcAft>
                 <a:spcPts val="1000"/>
               </a:spcAft>
+              <a:buSzPct val="100000"/>
               <a:buChar char="•"/>
               <a:lnSpc>
                 <a:spcPts val="2200"/>
@@ -5073,10 +5093,12 @@
             </a:r>
           </a:p>
           <a:p>
-            <a:pPr>
+            <a:pPr lvl="0" marL="457200" indent="-228600">
+              <a:buFont typeface="Calibri"/>
               <a:spcAft>
                 <a:spcPts val="1000"/>
               </a:spcAft>
+              <a:buSzPct val="100000"/>
               <a:buChar char="•"/>
               <a:lnSpc>
                 <a:spcPts val="2200"/>
@@ -5093,10 +5115,12 @@
             </a:r>
           </a:p>
           <a:p>
-            <a:pPr>
+            <a:pPr lvl="0" marL="457200" indent="-228600">
+              <a:buFont typeface="Calibri"/>
               <a:spcAft>
                 <a:spcPts val="1000"/>
               </a:spcAft>
+              <a:buSzPct val="100000"/>
               <a:buChar char="•"/>
               <a:lnSpc>
                 <a:spcPts val="2200"/>
@@ -5113,10 +5137,12 @@
             </a:r>
           </a:p>
           <a:p>
-            <a:pPr>
+            <a:pPr lvl="0" marL="457200" indent="-228600">
+              <a:buFont typeface="Calibri"/>
               <a:spcAft>
                 <a:spcPts val="1000"/>
               </a:spcAft>
+              <a:buSzPct val="100000"/>
               <a:buChar char="•"/>
               <a:lnSpc>
                 <a:spcPts val="2200"/>
@@ -5133,10 +5159,12 @@
             </a:r>
           </a:p>
           <a:p>
-            <a:pPr>
+            <a:pPr lvl="0" marL="457200" indent="-228600">
+              <a:buFont typeface="Calibri"/>
               <a:spcAft>
                 <a:spcPts val="1000"/>
               </a:spcAft>
+              <a:buSzPct val="100000"/>
               <a:buChar char="•"/>
               <a:lnSpc>
                 <a:spcPts val="2200"/>
@@ -5153,10 +5181,12 @@
             </a:r>
           </a:p>
           <a:p>
-            <a:pPr>
+            <a:pPr lvl="0" marL="457200" indent="-228600">
+              <a:buFont typeface="Calibri"/>
               <a:spcAft>
                 <a:spcPts val="1000"/>
               </a:spcAft>
+              <a:buSzPct val="100000"/>
               <a:buChar char="•"/>
               <a:lnSpc>
                 <a:spcPts val="2200"/>
@@ -5292,10 +5322,12 @@
           </a:bodyPr>
           <a:lstStyle/>
           <a:p>
-            <a:pPr>
+            <a:pPr lvl="0" marL="457200" indent="-228600">
+              <a:buFont typeface="Calibri"/>
               <a:spcAft>
                 <a:spcPts val="1000"/>
               </a:spcAft>
+              <a:buSzPct val="100000"/>
               <a:buChar char="•"/>
               <a:lnSpc>
                 <a:spcPts val="2200"/>
@@ -5312,10 +5344,12 @@
             </a:r>
           </a:p>
           <a:p>
-            <a:pPr>
+            <a:pPr lvl="0" marL="457200" indent="-228600">
+              <a:buFont typeface="Calibri"/>
               <a:spcAft>
                 <a:spcPts val="1000"/>
               </a:spcAft>
+              <a:buSzPct val="100000"/>
               <a:buChar char="•"/>
               <a:lnSpc>
                 <a:spcPts val="2200"/>
@@ -5332,10 +5366,12 @@
             </a:r>
           </a:p>
           <a:p>
-            <a:pPr>
+            <a:pPr lvl="0" marL="457200" indent="-228600">
+              <a:buFont typeface="Calibri"/>
               <a:spcAft>
                 <a:spcPts val="1000"/>
               </a:spcAft>
+              <a:buSzPct val="100000"/>
               <a:buChar char="•"/>
               <a:lnSpc>
                 <a:spcPts val="2200"/>
@@ -5352,10 +5388,12 @@
             </a:r>
           </a:p>
           <a:p>
-            <a:pPr>
+            <a:pPr lvl="0" marL="457200" indent="-228600">
+              <a:buFont typeface="Calibri"/>
               <a:spcAft>
                 <a:spcPts val="1000"/>
               </a:spcAft>
+              <a:buSzPct val="100000"/>
               <a:buChar char="•"/>
               <a:lnSpc>
                 <a:spcPts val="2200"/>
@@ -5372,10 +5410,12 @@
             </a:r>
           </a:p>
           <a:p>
-            <a:pPr>
+            <a:pPr lvl="0" marL="457200" indent="-228600">
+              <a:buFont typeface="Calibri"/>
               <a:spcAft>
                 <a:spcPts val="1000"/>
               </a:spcAft>
+              <a:buSzPct val="100000"/>
               <a:buChar char="•"/>
               <a:lnSpc>
                 <a:spcPts val="2200"/>
@@ -5392,10 +5432,12 @@
             </a:r>
           </a:p>
           <a:p>
-            <a:pPr>
+            <a:pPr lvl="0" marL="457200" indent="-228600">
+              <a:buFont typeface="Calibri"/>
               <a:spcAft>
                 <a:spcPts val="1000"/>
               </a:spcAft>
+              <a:buSzPct val="100000"/>
               <a:buChar char="•"/>
               <a:lnSpc>
                 <a:spcPts val="2200"/>
@@ -5531,10 +5573,12 @@
           </a:bodyPr>
           <a:lstStyle/>
           <a:p>
-            <a:pPr>
+            <a:pPr lvl="0" marL="457200" indent="-228600">
+              <a:buFont typeface="Calibri"/>
               <a:spcAft>
                 <a:spcPts val="1000"/>
               </a:spcAft>
+              <a:buSzPct val="100000"/>
               <a:buChar char="•"/>
               <a:lnSpc>
                 <a:spcPts val="2200"/>
@@ -5551,10 +5595,12 @@
             </a:r>
           </a:p>
           <a:p>
-            <a:pPr>
+            <a:pPr lvl="0" marL="457200" indent="-228600">
+              <a:buFont typeface="Calibri"/>
               <a:spcAft>
                 <a:spcPts val="1000"/>
               </a:spcAft>
+              <a:buSzPct val="100000"/>
               <a:buChar char="•"/>
               <a:lnSpc>
                 <a:spcPts val="2200"/>
@@ -5571,10 +5617,12 @@
             </a:r>
           </a:p>
           <a:p>
-            <a:pPr>
+            <a:pPr lvl="0" marL="457200" indent="-228600">
+              <a:buFont typeface="Calibri"/>
               <a:spcAft>
                 <a:spcPts val="1000"/>
               </a:spcAft>
+              <a:buSzPct val="100000"/>
               <a:buChar char="•"/>
               <a:lnSpc>
                 <a:spcPts val="2200"/>
@@ -5710,10 +5758,12 @@
           </a:bodyPr>
           <a:lstStyle/>
           <a:p>
-            <a:pPr>
+            <a:pPr lvl="0" marL="457200" indent="-228600">
+              <a:buFont typeface="Calibri"/>
               <a:spcAft>
                 <a:spcPts val="1000"/>
               </a:spcAft>
+              <a:buSzPct val="100000"/>
               <a:buChar char="•"/>
               <a:lnSpc>
                 <a:spcPts val="2200"/>
@@ -5730,10 +5780,12 @@
             </a:r>
           </a:p>
           <a:p>
-            <a:pPr>
+            <a:pPr lvl="0" marL="457200" indent="-228600">
+              <a:buFont typeface="Calibri"/>
               <a:spcAft>
                 <a:spcPts val="1000"/>
               </a:spcAft>
+              <a:buSzPct val="100000"/>
               <a:buChar char="•"/>
               <a:lnSpc>
                 <a:spcPts val="2200"/>
@@ -5750,10 +5802,12 @@
             </a:r>
           </a:p>
           <a:p>
-            <a:pPr>
+            <a:pPr lvl="0" marL="457200" indent="-228600">
+              <a:buFont typeface="Calibri"/>
               <a:spcAft>
                 <a:spcPts val="1000"/>
               </a:spcAft>
+              <a:buSzPct val="100000"/>
               <a:buChar char="•"/>
               <a:lnSpc>
                 <a:spcPts val="2200"/>
@@ -5770,10 +5824,12 @@
             </a:r>
           </a:p>
           <a:p>
-            <a:pPr>
+            <a:pPr lvl="0" marL="457200" indent="-228600">
+              <a:buFont typeface="Calibri"/>
               <a:spcAft>
                 <a:spcPts val="1000"/>
               </a:spcAft>
+              <a:buSzPct val="100000"/>
               <a:buChar char="•"/>
               <a:lnSpc>
                 <a:spcPts val="2200"/>
@@ -5790,10 +5846,12 @@
             </a:r>
           </a:p>
           <a:p>
-            <a:pPr>
+            <a:pPr lvl="0" marL="457200" indent="-228600">
+              <a:buFont typeface="Calibri"/>
               <a:spcAft>
                 <a:spcPts val="1000"/>
               </a:spcAft>
+              <a:buSzPct val="100000"/>
               <a:buChar char="•"/>
               <a:lnSpc>
                 <a:spcPts val="2200"/>
@@ -5929,10 +5987,12 @@
           </a:bodyPr>
           <a:lstStyle/>
           <a:p>
-            <a:pPr>
+            <a:pPr lvl="0" marL="457200" indent="-228600">
+              <a:buFont typeface="Calibri"/>
               <a:spcAft>
                 <a:spcPts val="1000"/>
               </a:spcAft>
+              <a:buSzPct val="100000"/>
               <a:buChar char="•"/>
               <a:lnSpc>
                 <a:spcPts val="2200"/>
@@ -5949,10 +6009,12 @@
             </a:r>
           </a:p>
           <a:p>
-            <a:pPr>
+            <a:pPr lvl="0" marL="457200" indent="-228600">
+              <a:buFont typeface="Calibri"/>
               <a:spcAft>
                 <a:spcPts val="1000"/>
               </a:spcAft>
+              <a:buSzPct val="100000"/>
               <a:buChar char="•"/>
               <a:lnSpc>
                 <a:spcPts val="2200"/>
@@ -5969,10 +6031,12 @@
             </a:r>
           </a:p>
           <a:p>
-            <a:pPr>
+            <a:pPr lvl="0" marL="457200" indent="-228600">
+              <a:buFont typeface="Calibri"/>
               <a:spcAft>
                 <a:spcPts val="1000"/>
               </a:spcAft>
+              <a:buSzPct val="100000"/>
               <a:buChar char="•"/>
               <a:lnSpc>
                 <a:spcPts val="2200"/>
@@ -5989,10 +6053,12 @@
             </a:r>
           </a:p>
           <a:p>
-            <a:pPr>
+            <a:pPr lvl="0" marL="457200" indent="-228600">
+              <a:buFont typeface="Calibri"/>
               <a:spcAft>
                 <a:spcPts val="1000"/>
               </a:spcAft>
+              <a:buSzPct val="100000"/>
               <a:buChar char="•"/>
               <a:lnSpc>
                 <a:spcPts val="2200"/>
@@ -6009,10 +6075,12 @@
             </a:r>
           </a:p>
           <a:p>
-            <a:pPr>
+            <a:pPr lvl="0" marL="457200" indent="-228600">
+              <a:buFont typeface="Calibri"/>
               <a:spcAft>
                 <a:spcPts val="1000"/>
               </a:spcAft>
+              <a:buSzPct val="100000"/>
               <a:buChar char="•"/>
               <a:lnSpc>
                 <a:spcPts val="2200"/>
@@ -6148,10 +6216,12 @@
           </a:bodyPr>
           <a:lstStyle/>
           <a:p>
-            <a:pPr>
+            <a:pPr lvl="0" marL="457200" indent="-228600">
+              <a:buFont typeface="Calibri"/>
               <a:spcAft>
                 <a:spcPts val="1000"/>
               </a:spcAft>
+              <a:buSzPct val="100000"/>
               <a:buChar char="•"/>
               <a:lnSpc>
                 <a:spcPts val="2200"/>
@@ -6168,10 +6238,12 @@
             </a:r>
           </a:p>
           <a:p>
-            <a:pPr>
+            <a:pPr lvl="0" marL="457200" indent="-228600">
+              <a:buFont typeface="Calibri"/>
               <a:spcAft>
                 <a:spcPts val="1000"/>
               </a:spcAft>
+              <a:buSzPct val="100000"/>
               <a:buChar char="•"/>
               <a:lnSpc>
                 <a:spcPts val="2200"/>
@@ -6188,10 +6260,12 @@
             </a:r>
           </a:p>
           <a:p>
-            <a:pPr>
+            <a:pPr lvl="0" marL="457200" indent="-228600">
+              <a:buFont typeface="Calibri"/>
               <a:spcAft>
                 <a:spcPts val="1000"/>
               </a:spcAft>
+              <a:buSzPct val="100000"/>
               <a:buChar char="•"/>
               <a:lnSpc>
                 <a:spcPts val="2200"/>
